--- a/lecons/LSA/Geomorphology/14_LSA_GEOMO_L12_Mass_Wasting_Movement.pptx
+++ b/lecons/LSA/Geomorphology/14_LSA_GEOMO_L12_Mass_Wasting_Movement.pptx
@@ -3201,7 +3201,7 @@
           <a:p>
             <a:r>
               <a:rPr lang="en-US" dirty="0"/>
-              <a:t>We continue with the definitions. On this slide we have Angle of repose and Soil creep. Write each point on a new line, with the key term first, and explain it in your own words when we revise.</a:t>
+              <a:t>We continue with the definitions. On this slide we have Angle of repose and Terracettes. Write each point on a new line, with the key term first, and explain it in your own words when we revise.</a:t>
             </a:r>
             <a:endParaRPr lang="en-US" dirty="0"/>
           </a:p>
@@ -3289,7 +3289,7 @@
           <a:p>
             <a:r>
               <a:rPr lang="en-US" dirty="0"/>
-              <a:t>Let us copy Meaning and Evidence of Mass Wasting. Mass wasting and its evidence are presented as follows. Copy the point on Meaning on the left, then draw the diagram on the right: soil creep. Give it a title and label it clearly.</a:t>
+              <a:t>Let us copy Meaning and Evidence of Mass Wasting. Mass wasting and its evidence are explained as follows. Copy the point on Meaning on the left, then draw the diagram on the right: soil creep. Give it a title and label it clearly.</a:t>
             </a:r>
             <a:endParaRPr lang="en-US" dirty="0"/>
           </a:p>
@@ -3377,7 +3377,7 @@
           <a:p>
             <a:r>
               <a:rPr lang="en-US" dirty="0"/>
-              <a:t>We continue with Meaning and Evidence of Mass Wasting. On this slide we have Tilted objects and Curved tree trunks. Write each point on a new line, with the key term first, and explain it in your own words when we revise.</a:t>
+              <a:t>We continue with Meaning and Evidence of Mass Wasting. Copy the point on Tilted objects and curved trees: write the key term first, then its explanation.</a:t>
             </a:r>
             <a:endParaRPr lang="en-US" dirty="0"/>
           </a:p>
@@ -3553,7 +3553,7 @@
           <a:p>
             <a:r>
               <a:rPr lang="en-US" dirty="0"/>
-              <a:t>Copy the point on Terracettes on the left, then draw the diagram on the right: evidence of mass wasting. Give it a title and label it clearly.</a:t>
+              <a:t>Copy the point on Terracettes and tension cracks on the left, then draw the diagram on the right: evidence of mass wasting. Give it a title and label it clearly.</a:t>
             </a:r>
             <a:endParaRPr lang="en-US" dirty="0"/>
           </a:p>
@@ -3641,7 +3641,7 @@
           <a:p>
             <a:r>
               <a:rPr lang="en-US" dirty="0"/>
-              <a:t>We continue with Meaning and Evidence of Mass Wasting. On this slide we have Tension cracks. Write each point on a new line, with the key term first, and explain it in your own words when we revise.</a:t>
+              <a:t>Let us copy Factors of Mass Wasting. Mass wasting is influenced by the following factors. Copy the point on Gravity and slope angle on the left, then draw the diagram on the right: the factors of mass wasting. Give it a title and label it clearly.</a:t>
             </a:r>
             <a:endParaRPr lang="en-US" dirty="0"/>
           </a:p>
@@ -3729,7 +3729,7 @@
           <a:p>
             <a:r>
               <a:rPr lang="en-US" dirty="0"/>
-              <a:t>Let us copy Factors of Mass Wasting. The factors of mass wasting are the following. Copy the point on Gravity on the left, then draw the diagram on the right: factors of mass wasting. Give it a title and label it clearly.</a:t>
+              <a:t>We continue with Factors of Mass Wasting. Copy the point on Water: write the key term first, then its explanation.</a:t>
             </a:r>
             <a:endParaRPr lang="en-US" dirty="0"/>
           </a:p>
@@ -3817,7 +3817,7 @@
           <a:p>
             <a:r>
               <a:rPr lang="en-US" dirty="0"/>
-              <a:t>We continue with Factors of Mass Wasting. On this slide we have Water, Slope angle and Lack of vegetation. Write each point on a new line, with the key term first, and explain it in your own words when we revise. When you finish, we go to the next slide.</a:t>
+              <a:t>We continue with Factors of Mass Wasting. Copy the point on Vegetation: write the key term first, then its explanation.</a:t>
             </a:r>
             <a:endParaRPr lang="en-US" dirty="0"/>
           </a:p>
@@ -3905,7 +3905,7 @@
           <a:p>
             <a:r>
               <a:rPr lang="en-US" dirty="0"/>
-              <a:t>We continue with Factors of Mass Wasting. On this slide we have Human activities and vibrations. Write each point on a new line, with the key term first, and explain it in your own words when we revise.</a:t>
+              <a:t>We continue with Factors of Mass Wasting. Copy the point on Human activities and vibrations: write the key term first, then its explanation.</a:t>
             </a:r>
             <a:endParaRPr lang="en-US" dirty="0"/>
           </a:p>
@@ -3993,7 +3993,7 @@
           <a:p>
             <a:r>
               <a:rPr lang="en-US" dirty="0"/>
-              <a:t>Let us copy Classification of Mass Wasting. Mass movements are classified by speed and water content as follows. Copy the point on Carson and Kirkby on the left, then draw the diagram on the right: classification of mass movements. Give it a title and label it clearly.</a:t>
+              <a:t>Let us copy Classification of Mass Wasting. Carson and Kirkby classify mass movements as follows. Copy the point on Basis of the classification on the left, then draw the diagram on the right: carson and Kirkby's triangle. Give it a title and label it clearly.</a:t>
             </a:r>
             <a:endParaRPr lang="en-US" dirty="0"/>
           </a:p>
@@ -4081,7 +4081,7 @@
           <a:p>
             <a:r>
               <a:rPr lang="en-US" dirty="0"/>
-              <a:t>We continue with Classification of Mass Wasting. On this slide we have Creep and Falls. Write each point on a new line, with the key term first, and explain it in your own words when we revise.</a:t>
+              <a:t>We continue with Classification of Mass Wasting. Copy the point on Heave (slow movements): write the key term first, then its explanation.</a:t>
             </a:r>
             <a:endParaRPr lang="en-US" dirty="0"/>
           </a:p>
@@ -4169,7 +4169,7 @@
           <a:p>
             <a:r>
               <a:rPr lang="en-US" dirty="0"/>
-              <a:t>Copy the point on Slides on the left, then draw the diagram on the right: a landslide. Give it a title and label it clearly.</a:t>
+              <a:t>Copy the point on Slides and falls (fast, dry movements) on the left, then draw the diagram on the right: a landslide. Give it a title and label it clearly.</a:t>
             </a:r>
             <a:endParaRPr lang="en-US" dirty="0"/>
           </a:p>
@@ -4257,7 +4257,7 @@
           <a:p>
             <a:r>
               <a:rPr lang="en-US" dirty="0"/>
-              <a:t>We continue with Classification of Mass Wasting. On this slide we have Flows. Write each point on a new line, with the key term first, and explain it in your own words when we revise.</a:t>
+              <a:t>We continue with Classification of Mass Wasting. Copy the point on Flows (wet movements): write the key term first, then its explanation.</a:t>
             </a:r>
             <a:endParaRPr lang="en-US" dirty="0"/>
           </a:p>
@@ -14863,7 +14863,7 @@
                 <a:ea typeface="Times New Roman" pitchFamily="34" charset="-122"/>
                 <a:cs typeface="Times New Roman" pitchFamily="34" charset="-120"/>
               </a:rPr>
-              <a:t>Soil creep: </a:t>
+              <a:t>Terracettes: </a:t>
             </a:r>
             <a:pPr algn="l" indent="0" marL="0">
               <a:spcAft>
@@ -14880,7 +14880,7 @@
                 <a:ea typeface="Times New Roman" pitchFamily="34" charset="-122"/>
                 <a:cs typeface="Times New Roman" pitchFamily="34" charset="-120"/>
               </a:rPr>
-              <a:t>It is the very slow downhill movement of soil.</a:t>
+              <a:t>They are small step-like ridges formed on grassy slopes by soil creep.</a:t>
             </a:r>
             <a:endParaRPr lang="en-US" sz="4000" dirty="0"/>
           </a:p>
@@ -15048,7 +15048,7 @@
         <p:spPr>
           <a:xfrm>
             <a:off x="365760" y="1783080"/>
-            <a:ext cx="4846320" cy="4617720"/>
+            <a:ext cx="6035040" cy="4617720"/>
           </a:xfrm>
           <a:prstGeom prst="rect">
             <a:avLst/>
@@ -15067,7 +15067,7 @@
               <a:buNone/>
             </a:pPr>
             <a:r>
-              <a:rPr lang="en-US" sz="3600" i="1" dirty="0">
+              <a:rPr lang="en-US" sz="3200" i="1" dirty="0">
                 <a:solidFill>
                   <a:srgbClr val="111111"/>
                 </a:solidFill>
@@ -15075,9 +15075,9 @@
                 <a:ea typeface="Times New Roman" pitchFamily="34" charset="-122"/>
                 <a:cs typeface="Times New Roman" pitchFamily="34" charset="-120"/>
               </a:rPr>
-              <a:t>Mass wasting and its evidence are presented as follows:</a:t>
-            </a:r>
-            <a:endParaRPr lang="en-US" sz="3600" dirty="0"/>
+              <a:t>Mass wasting and its evidence are explained as follows:</a:t>
+            </a:r>
+            <a:endParaRPr lang="en-US" sz="3200" dirty="0"/>
           </a:p>
           <a:p>
             <a:pPr algn="l" indent="0" marL="0">
@@ -15087,7 +15087,7 @@
               <a:buNone/>
             </a:pPr>
             <a:r>
-              <a:rPr lang="en-US" sz="3600" b="1" dirty="0">
+              <a:rPr lang="en-US" sz="3200" b="1" dirty="0">
                 <a:solidFill>
                   <a:srgbClr val="111111"/>
                 </a:solidFill>
@@ -15104,7 +15104,7 @@
               <a:buNone/>
             </a:pPr>
             <a:r>
-              <a:rPr lang="en-US" sz="3600" dirty="0">
+              <a:rPr lang="en-US" sz="3200" dirty="0">
                 <a:solidFill>
                   <a:srgbClr val="111111"/>
                 </a:solidFill>
@@ -15112,9 +15112,9 @@
                 <a:ea typeface="Times New Roman" pitchFamily="34" charset="-122"/>
                 <a:cs typeface="Times New Roman" pitchFamily="34" charset="-120"/>
               </a:rPr>
-              <a:t>Unlike erosion, mass wasting needs no transporting agent: gravity is the main force.</a:t>
-            </a:r>
-            <a:endParaRPr lang="en-US" sz="3600" dirty="0"/>
+              <a:t>Mass wasting is the movement of weathered material down a slope as a single mass, pulled by gravity. Unlike erosion, it needs no transporting agent such as a river or wind.</a:t>
+            </a:r>
+            <a:endParaRPr lang="en-US" sz="3200" dirty="0"/>
           </a:p>
         </p:txBody>
       </p:sp>
@@ -15134,8 +15134,8 @@
         </p:blipFill>
         <p:spPr>
           <a:xfrm>
-            <a:off x="5349240" y="2617506"/>
-            <a:ext cx="6659575" cy="2601397"/>
+            <a:off x="6537960" y="2849678"/>
+            <a:ext cx="5470855" cy="2137053"/>
           </a:xfrm>
           <a:prstGeom prst="rect">
             <a:avLst/>
@@ -15150,8 +15150,8 @@
         </p:nvSpPr>
         <p:spPr>
           <a:xfrm>
-            <a:off x="5349240" y="6089904"/>
-            <a:ext cx="6659575" cy="347472"/>
+            <a:off x="6537960" y="6089904"/>
+            <a:ext cx="5470855" cy="347472"/>
           </a:xfrm>
           <a:prstGeom prst="rect">
             <a:avLst/>
@@ -15310,7 +15310,7 @@
         <p:spPr>
           <a:xfrm>
             <a:off x="0" y="658368"/>
-            <a:ext cx="5120640" cy="5833872"/>
+            <a:ext cx="3840480" cy="5833872"/>
           </a:xfrm>
           <a:prstGeom prst="rect">
             <a:avLst/>
@@ -15325,8 +15325,8 @@
         </p:nvSpPr>
         <p:spPr>
           <a:xfrm>
-            <a:off x="5349240" y="1005840"/>
-            <a:ext cx="6522415" cy="731520"/>
+            <a:off x="4069080" y="1005840"/>
+            <a:ext cx="7802575" cy="731520"/>
           </a:xfrm>
           <a:prstGeom prst="rect">
             <a:avLst/>
@@ -15366,8 +15366,8 @@
         </p:nvSpPr>
         <p:spPr>
           <a:xfrm>
-            <a:off x="5349240" y="1783080"/>
-            <a:ext cx="6522415" cy="4663440"/>
+            <a:off x="4069080" y="1783080"/>
+            <a:ext cx="7802575" cy="4663440"/>
           </a:xfrm>
           <a:prstGeom prst="rect">
             <a:avLst/>
@@ -15394,7 +15394,7 @@
                 <a:ea typeface="Times New Roman" pitchFamily="34" charset="-122"/>
                 <a:cs typeface="Times New Roman" pitchFamily="34" charset="-120"/>
               </a:rPr>
-              <a:t>Tilted objects: </a:t>
+              <a:t>Tilted objects and curved trees: </a:t>
             </a:r>
             <a:pPr algn="l" indent="0" marL="0">
               <a:spcAft>
@@ -15411,44 +15411,7 @@
                 <a:ea typeface="Times New Roman" pitchFamily="34" charset="-122"/>
                 <a:cs typeface="Times New Roman" pitchFamily="34" charset="-120"/>
               </a:rPr>
-              <a:t>Fences, poles and walls lean downhill.</a:t>
-            </a:r>
-            <a:endParaRPr lang="en-US" sz="4000" dirty="0"/>
-          </a:p>
-          <a:p>
-            <a:pPr algn="l" indent="0" marL="0">
-              <a:spcAft>
-                <a:spcPts val="800"/>
-              </a:spcAft>
-              <a:buNone/>
-            </a:pPr>
-            <a:r>
-              <a:rPr lang="en-US" sz="4000" b="1" dirty="0">
-                <a:solidFill>
-                  <a:srgbClr val="111111"/>
-                </a:solidFill>
-                <a:latin typeface="Times New Roman" pitchFamily="34" charset="0"/>
-                <a:ea typeface="Times New Roman" pitchFamily="34" charset="-122"/>
-                <a:cs typeface="Times New Roman" pitchFamily="34" charset="-120"/>
-              </a:rPr>
-              <a:t>Curved tree trunks: </a:t>
-            </a:r>
-            <a:pPr algn="l" indent="0" marL="0">
-              <a:spcAft>
-                <a:spcPts val="800"/>
-              </a:spcAft>
-              <a:buNone/>
-            </a:pPr>
-            <a:r>
-              <a:rPr lang="en-US" sz="4000" dirty="0">
-                <a:solidFill>
-                  <a:srgbClr val="111111"/>
-                </a:solidFill>
-                <a:latin typeface="Times New Roman" pitchFamily="34" charset="0"/>
-                <a:ea typeface="Times New Roman" pitchFamily="34" charset="-122"/>
-                <a:cs typeface="Times New Roman" pitchFamily="34" charset="-120"/>
-              </a:rPr>
-              <a:t>Trees keep growing upwards while the soil moves, so their base curves.</a:t>
+              <a:t>Fences, electric poles, gravestones and walls lean downhill because the soil below them moves. Trees keep growing upwards while the soil moves, so their trunks curve at the base.</a:t>
             </a:r>
             <a:endParaRPr lang="en-US" sz="4000" dirty="0"/>
           </a:p>
@@ -15855,7 +15818,7 @@
         <p:spPr>
           <a:xfrm>
             <a:off x="365760" y="1783080"/>
-            <a:ext cx="4846320" cy="4617720"/>
+            <a:ext cx="6035040" cy="4617720"/>
           </a:xfrm>
           <a:prstGeom prst="rect">
             <a:avLst/>
@@ -15882,7 +15845,7 @@
                 <a:ea typeface="Times New Roman" pitchFamily="34" charset="-122"/>
                 <a:cs typeface="Times New Roman" pitchFamily="34" charset="-120"/>
               </a:rPr>
-              <a:t>Terracettes: </a:t>
+              <a:t>Terracettes and tension cracks: </a:t>
             </a:r>
             <a:pPr algn="l" indent="0" marL="0">
               <a:spcAft>
@@ -15899,7 +15862,7 @@
                 <a:ea typeface="Times New Roman" pitchFamily="34" charset="-122"/>
                 <a:cs typeface="Times New Roman" pitchFamily="34" charset="-120"/>
               </a:rPr>
-              <a:t>Small step-like ridges form on grassy slopes.</a:t>
+              <a:t>Small step-like ridges called terracettes form on grassy slopes. Cracks at the top of a slope show that a block of land is pulling away and may slide.</a:t>
             </a:r>
             <a:endParaRPr lang="en-US" sz="3600" dirty="0"/>
           </a:p>
@@ -15921,8 +15884,8 @@
         </p:blipFill>
         <p:spPr>
           <a:xfrm>
-            <a:off x="5349240" y="2617506"/>
-            <a:ext cx="6659575" cy="2601397"/>
+            <a:off x="6537960" y="2849678"/>
+            <a:ext cx="5470855" cy="2137053"/>
           </a:xfrm>
           <a:prstGeom prst="rect">
             <a:avLst/>
@@ -15937,8 +15900,8 @@
         </p:nvSpPr>
         <p:spPr>
           <a:xfrm>
-            <a:off x="5349240" y="6089904"/>
-            <a:ext cx="6659575" cy="347472"/>
+            <a:off x="6537960" y="6089904"/>
+            <a:ext cx="5470855" cy="347472"/>
           </a:xfrm>
           <a:prstGeom prst="rect">
             <a:avLst/>
@@ -16080,9 +16043,129 @@
           </a:p>
         </p:txBody>
       </p:sp>
+      <p:sp>
+        <p:nvSpPr>
+          <p:cNvPr id="3" name="Text 1"/>
+          <p:cNvSpPr/>
+          <p:nvPr/>
+        </p:nvSpPr>
+        <p:spPr>
+          <a:xfrm>
+            <a:off x="365760" y="1005840"/>
+            <a:ext cx="11460175" cy="731520"/>
+          </a:xfrm>
+          <a:prstGeom prst="rect">
+            <a:avLst/>
+          </a:prstGeom>
+          <a:noFill/>
+          <a:ln/>
+        </p:spPr>
+        <p:txBody>
+          <a:bodyPr wrap="square" lIns="0" tIns="0" rIns="0" bIns="0" rtlCol="0" anchor="ctr">
+            <a:normAutofit/>
+          </a:bodyPr>
+          <a:lstStyle/>
+          <a:p>
+            <a:pPr algn="ctr" indent="0" marL="0">
+              <a:buNone/>
+            </a:pPr>
+            <a:r>
+              <a:rPr lang="en-US" sz="3600" b="1" dirty="0">
+                <a:solidFill>
+                  <a:srgbClr val="990011"/>
+                </a:solidFill>
+                <a:latin typeface="Times New Roman" pitchFamily="34" charset="0"/>
+                <a:ea typeface="Times New Roman" pitchFamily="34" charset="-122"/>
+                <a:cs typeface="Times New Roman" pitchFamily="34" charset="-120"/>
+              </a:rPr>
+              <a:t>2. Factors of Mass Wasting</a:t>
+            </a:r>
+            <a:endParaRPr lang="en-US" sz="3600" dirty="0"/>
+          </a:p>
+        </p:txBody>
+      </p:sp>
+      <p:sp>
+        <p:nvSpPr>
+          <p:cNvPr id="4" name="Text 2"/>
+          <p:cNvSpPr/>
+          <p:nvPr/>
+        </p:nvSpPr>
+        <p:spPr>
+          <a:xfrm>
+            <a:off x="365760" y="1783080"/>
+            <a:ext cx="6035040" cy="4617720"/>
+          </a:xfrm>
+          <a:prstGeom prst="rect">
+            <a:avLst/>
+          </a:prstGeom>
+          <a:noFill/>
+          <a:ln/>
+        </p:spPr>
+        <p:txBody>
+          <a:bodyPr wrap="square" lIns="0" tIns="0" rIns="0" bIns="0" rtlCol="0" anchor="t"/>
+          <a:lstStyle/>
+          <a:p>
+            <a:pPr algn="l" indent="0" marL="0">
+              <a:spcAft>
+                <a:spcPts val="800"/>
+              </a:spcAft>
+              <a:buNone/>
+            </a:pPr>
+            <a:r>
+              <a:rPr lang="en-US" sz="3200" i="1" dirty="0">
+                <a:solidFill>
+                  <a:srgbClr val="111111"/>
+                </a:solidFill>
+                <a:latin typeface="Times New Roman" pitchFamily="34" charset="0"/>
+                <a:ea typeface="Times New Roman" pitchFamily="34" charset="-122"/>
+                <a:cs typeface="Times New Roman" pitchFamily="34" charset="-120"/>
+              </a:rPr>
+              <a:t>Mass wasting is influenced by the following factors:</a:t>
+            </a:r>
+            <a:endParaRPr lang="en-US" sz="3200" dirty="0"/>
+          </a:p>
+          <a:p>
+            <a:pPr algn="l" indent="0" marL="0">
+              <a:spcAft>
+                <a:spcPts val="800"/>
+              </a:spcAft>
+              <a:buNone/>
+            </a:pPr>
+            <a:r>
+              <a:rPr lang="en-US" sz="3200" b="1" dirty="0">
+                <a:solidFill>
+                  <a:srgbClr val="111111"/>
+                </a:solidFill>
+                <a:latin typeface="Times New Roman" pitchFamily="34" charset="0"/>
+                <a:ea typeface="Times New Roman" pitchFamily="34" charset="-122"/>
+                <a:cs typeface="Times New Roman" pitchFamily="34" charset="-120"/>
+              </a:rPr>
+              <a:t>Gravity and slope angle: </a:t>
+            </a:r>
+            <a:pPr algn="l" indent="0" marL="0">
+              <a:spcAft>
+                <a:spcPts val="800"/>
+              </a:spcAft>
+              <a:buNone/>
+            </a:pPr>
+            <a:r>
+              <a:rPr lang="en-US" sz="3200" dirty="0">
+                <a:solidFill>
+                  <a:srgbClr val="111111"/>
+                </a:solidFill>
+                <a:latin typeface="Times New Roman" pitchFamily="34" charset="0"/>
+                <a:ea typeface="Times New Roman" pitchFamily="34" charset="-122"/>
+                <a:cs typeface="Times New Roman" pitchFamily="34" charset="-120"/>
+              </a:rPr>
+              <a:t>Gravity is the force that pulls material downhill, and it acts more strongly on steep slopes. When a slope becomes steeper than the angle of repose of its material, it becomes unstable.</a:t>
+            </a:r>
+            <a:endParaRPr lang="en-US" sz="3200" dirty="0"/>
+          </a:p>
+        </p:txBody>
+      </p:sp>
       <p:pic>
         <p:nvPicPr>
-          <p:cNvPr id="3" name="Image 0" descr="/home/claude/f4/img/minesec_sheet.png">    </p:cNvPr>
+          <p:cNvPr id="5" name="Image 0" descr="/home/claude/f4/img/v2/geo2_mw_factors.png">    </p:cNvPr>
           <p:cNvPicPr>
             <a:picLocks noChangeAspect="1"/>
           </p:cNvPicPr>
@@ -16096,8 +16179,8 @@
         </p:blipFill>
         <p:spPr>
           <a:xfrm>
-            <a:off x="0" y="658368"/>
-            <a:ext cx="5120640" cy="5833872"/>
+            <a:off x="6537960" y="2849678"/>
+            <a:ext cx="5470855" cy="2137053"/>
           </a:xfrm>
           <a:prstGeom prst="rect">
             <a:avLst/>
@@ -16106,14 +16189,14 @@
       </p:pic>
       <p:sp>
         <p:nvSpPr>
-          <p:cNvPr id="4" name="Text 1"/>
+          <p:cNvPr id="6" name="Text 3"/>
           <p:cNvSpPr/>
           <p:nvPr/>
         </p:nvSpPr>
         <p:spPr>
           <a:xfrm>
-            <a:off x="5349240" y="1005840"/>
-            <a:ext cx="6522415" cy="731520"/>
+            <a:off x="6537960" y="6089904"/>
+            <a:ext cx="5470855" cy="347472"/>
           </a:xfrm>
           <a:prstGeom prst="rect">
             <a:avLst/>
@@ -16122,85 +16205,24 @@
           <a:ln/>
         </p:spPr>
         <p:txBody>
-          <a:bodyPr wrap="square" lIns="0" tIns="0" rIns="0" bIns="0" rtlCol="0" anchor="ctr">
-            <a:normAutofit/>
-          </a:bodyPr>
+          <a:bodyPr wrap="square" lIns="0" tIns="0" rIns="0" bIns="0" rtlCol="0" anchor="ctr"/>
           <a:lstStyle/>
           <a:p>
             <a:pPr algn="ctr" indent="0" marL="0">
               <a:buNone/>
             </a:pPr>
             <a:r>
-              <a:rPr lang="en-US" sz="3600" b="1" dirty="0">
-                <a:solidFill>
-                  <a:srgbClr val="990011"/>
+              <a:rPr lang="en-US" sz="1600" i="1" dirty="0">
+                <a:solidFill>
+                  <a:srgbClr val="555555"/>
                 </a:solidFill>
                 <a:latin typeface="Times New Roman" pitchFamily="34" charset="0"/>
                 <a:ea typeface="Times New Roman" pitchFamily="34" charset="-122"/>
                 <a:cs typeface="Times New Roman" pitchFamily="34" charset="-120"/>
               </a:rPr>
-              <a:t>1. Meaning and Evidence of Mass Wasting</a:t>
-            </a:r>
-            <a:endParaRPr lang="en-US" sz="3600" dirty="0"/>
-          </a:p>
-        </p:txBody>
-      </p:sp>
-      <p:sp>
-        <p:nvSpPr>
-          <p:cNvPr id="5" name="Text 2"/>
-          <p:cNvSpPr/>
-          <p:nvPr/>
-        </p:nvSpPr>
-        <p:spPr>
-          <a:xfrm>
-            <a:off x="5349240" y="1783080"/>
-            <a:ext cx="6522415" cy="4663440"/>
-          </a:xfrm>
-          <a:prstGeom prst="rect">
-            <a:avLst/>
-          </a:prstGeom>
-          <a:noFill/>
-          <a:ln/>
-        </p:spPr>
-        <p:txBody>
-          <a:bodyPr wrap="square" lIns="0" tIns="0" rIns="0" bIns="0" rtlCol="0" anchor="t"/>
-          <a:lstStyle/>
-          <a:p>
-            <a:pPr algn="l" indent="0" marL="0">
-              <a:spcAft>
-                <a:spcPts val="800"/>
-              </a:spcAft>
-              <a:buNone/>
-            </a:pPr>
-            <a:r>
-              <a:rPr lang="en-US" sz="4000" b="1" dirty="0">
-                <a:solidFill>
-                  <a:srgbClr val="111111"/>
-                </a:solidFill>
-                <a:latin typeface="Times New Roman" pitchFamily="34" charset="0"/>
-                <a:ea typeface="Times New Roman" pitchFamily="34" charset="-122"/>
-                <a:cs typeface="Times New Roman" pitchFamily="34" charset="-120"/>
-              </a:rPr>
-              <a:t>Tension cracks: </a:t>
-            </a:r>
-            <a:pPr algn="l" indent="0" marL="0">
-              <a:spcAft>
-                <a:spcPts val="800"/>
-              </a:spcAft>
-              <a:buNone/>
-            </a:pPr>
-            <a:r>
-              <a:rPr lang="en-US" sz="4000" dirty="0">
-                <a:solidFill>
-                  <a:srgbClr val="111111"/>
-                </a:solidFill>
-                <a:latin typeface="Times New Roman" pitchFamily="34" charset="0"/>
-                <a:ea typeface="Times New Roman" pitchFamily="34" charset="-122"/>
-                <a:cs typeface="Times New Roman" pitchFamily="34" charset="-120"/>
-              </a:rPr>
-              <a:t>Cracks at the top of a slope show that a block is pulling away.</a:t>
-            </a:r>
-            <a:endParaRPr lang="en-US" sz="4000" dirty="0"/>
+              <a:t>Illustration: the factors of mass wasting</a:t>
+            </a:r>
+            <a:endParaRPr lang="en-US" sz="1600" dirty="0"/>
           </a:p>
         </p:txBody>
       </p:sp>
@@ -16316,129 +16338,9 @@
           </a:p>
         </p:txBody>
       </p:sp>
-      <p:sp>
-        <p:nvSpPr>
-          <p:cNvPr id="3" name="Text 1"/>
-          <p:cNvSpPr/>
-          <p:nvPr/>
-        </p:nvSpPr>
-        <p:spPr>
-          <a:xfrm>
-            <a:off x="365760" y="1005840"/>
-            <a:ext cx="11460175" cy="731520"/>
-          </a:xfrm>
-          <a:prstGeom prst="rect">
-            <a:avLst/>
-          </a:prstGeom>
-          <a:noFill/>
-          <a:ln/>
-        </p:spPr>
-        <p:txBody>
-          <a:bodyPr wrap="square" lIns="0" tIns="0" rIns="0" bIns="0" rtlCol="0" anchor="ctr">
-            <a:normAutofit/>
-          </a:bodyPr>
-          <a:lstStyle/>
-          <a:p>
-            <a:pPr algn="ctr" indent="0" marL="0">
-              <a:buNone/>
-            </a:pPr>
-            <a:r>
-              <a:rPr lang="en-US" sz="3600" b="1" dirty="0">
-                <a:solidFill>
-                  <a:srgbClr val="990011"/>
-                </a:solidFill>
-                <a:latin typeface="Times New Roman" pitchFamily="34" charset="0"/>
-                <a:ea typeface="Times New Roman" pitchFamily="34" charset="-122"/>
-                <a:cs typeface="Times New Roman" pitchFamily="34" charset="-120"/>
-              </a:rPr>
-              <a:t>2. Factors of Mass Wasting</a:t>
-            </a:r>
-            <a:endParaRPr lang="en-US" sz="3600" dirty="0"/>
-          </a:p>
-        </p:txBody>
-      </p:sp>
-      <p:sp>
-        <p:nvSpPr>
-          <p:cNvPr id="4" name="Text 2"/>
-          <p:cNvSpPr/>
-          <p:nvPr/>
-        </p:nvSpPr>
-        <p:spPr>
-          <a:xfrm>
-            <a:off x="365760" y="1783080"/>
-            <a:ext cx="4846320" cy="4617720"/>
-          </a:xfrm>
-          <a:prstGeom prst="rect">
-            <a:avLst/>
-          </a:prstGeom>
-          <a:noFill/>
-          <a:ln/>
-        </p:spPr>
-        <p:txBody>
-          <a:bodyPr wrap="square" lIns="0" tIns="0" rIns="0" bIns="0" rtlCol="0" anchor="t"/>
-          <a:lstStyle/>
-          <a:p>
-            <a:pPr algn="l" indent="0" marL="0">
-              <a:spcAft>
-                <a:spcPts val="800"/>
-              </a:spcAft>
-              <a:buNone/>
-            </a:pPr>
-            <a:r>
-              <a:rPr lang="en-US" sz="3600" i="1" dirty="0">
-                <a:solidFill>
-                  <a:srgbClr val="111111"/>
-                </a:solidFill>
-                <a:latin typeface="Times New Roman" pitchFamily="34" charset="0"/>
-                <a:ea typeface="Times New Roman" pitchFamily="34" charset="-122"/>
-                <a:cs typeface="Times New Roman" pitchFamily="34" charset="-120"/>
-              </a:rPr>
-              <a:t>The factors of mass wasting are the following:</a:t>
-            </a:r>
-            <a:endParaRPr lang="en-US" sz="3600" dirty="0"/>
-          </a:p>
-          <a:p>
-            <a:pPr algn="l" indent="0" marL="0">
-              <a:spcAft>
-                <a:spcPts val="800"/>
-              </a:spcAft>
-              <a:buNone/>
-            </a:pPr>
-            <a:r>
-              <a:rPr lang="en-US" sz="3600" b="1" dirty="0">
-                <a:solidFill>
-                  <a:srgbClr val="111111"/>
-                </a:solidFill>
-                <a:latin typeface="Times New Roman" pitchFamily="34" charset="0"/>
-                <a:ea typeface="Times New Roman" pitchFamily="34" charset="-122"/>
-                <a:cs typeface="Times New Roman" pitchFamily="34" charset="-120"/>
-              </a:rPr>
-              <a:t>Gravity: </a:t>
-            </a:r>
-            <a:pPr algn="l" indent="0" marL="0">
-              <a:spcAft>
-                <a:spcPts val="800"/>
-              </a:spcAft>
-              <a:buNone/>
-            </a:pPr>
-            <a:r>
-              <a:rPr lang="en-US" sz="3600" dirty="0">
-                <a:solidFill>
-                  <a:srgbClr val="111111"/>
-                </a:solidFill>
-                <a:latin typeface="Times New Roman" pitchFamily="34" charset="0"/>
-                <a:ea typeface="Times New Roman" pitchFamily="34" charset="-122"/>
-                <a:cs typeface="Times New Roman" pitchFamily="34" charset="-120"/>
-              </a:rPr>
-              <a:t>It is the driving force pulling material downslope.</a:t>
-            </a:r>
-            <a:endParaRPr lang="en-US" sz="3600" dirty="0"/>
-          </a:p>
-        </p:txBody>
-      </p:sp>
       <p:pic>
         <p:nvPicPr>
-          <p:cNvPr id="5" name="Image 0" descr="/home/claude/f4/img/v2/geo2_mw_factors.png">    </p:cNvPr>
+          <p:cNvPr id="3" name="Image 0" descr="/home/claude/f4/img/minesec_sheet.png">    </p:cNvPr>
           <p:cNvPicPr>
             <a:picLocks noChangeAspect="1"/>
           </p:cNvPicPr>
@@ -16452,8 +16354,8 @@
         </p:blipFill>
         <p:spPr>
           <a:xfrm>
-            <a:off x="5349240" y="2617506"/>
-            <a:ext cx="6659575" cy="2601397"/>
+            <a:off x="0" y="658368"/>
+            <a:ext cx="5120640" cy="5833872"/>
           </a:xfrm>
           <a:prstGeom prst="rect">
             <a:avLst/>
@@ -16462,14 +16364,14 @@
       </p:pic>
       <p:sp>
         <p:nvSpPr>
-          <p:cNvPr id="6" name="Text 3"/>
+          <p:cNvPr id="4" name="Text 1"/>
           <p:cNvSpPr/>
           <p:nvPr/>
         </p:nvSpPr>
         <p:spPr>
           <a:xfrm>
-            <a:off x="5349240" y="6089904"/>
-            <a:ext cx="6659575" cy="347472"/>
+            <a:off x="5349240" y="1005840"/>
+            <a:ext cx="6522415" cy="731520"/>
           </a:xfrm>
           <a:prstGeom prst="rect">
             <a:avLst/>
@@ -16478,24 +16380,85 @@
           <a:ln/>
         </p:spPr>
         <p:txBody>
-          <a:bodyPr wrap="square" lIns="0" tIns="0" rIns="0" bIns="0" rtlCol="0" anchor="ctr"/>
+          <a:bodyPr wrap="square" lIns="0" tIns="0" rIns="0" bIns="0" rtlCol="0" anchor="ctr">
+            <a:normAutofit/>
+          </a:bodyPr>
           <a:lstStyle/>
           <a:p>
             <a:pPr algn="ctr" indent="0" marL="0">
               <a:buNone/>
             </a:pPr>
             <a:r>
-              <a:rPr lang="en-US" sz="1600" i="1" dirty="0">
-                <a:solidFill>
-                  <a:srgbClr val="555555"/>
+              <a:rPr lang="en-US" sz="3600" b="1" dirty="0">
+                <a:solidFill>
+                  <a:srgbClr val="990011"/>
                 </a:solidFill>
                 <a:latin typeface="Times New Roman" pitchFamily="34" charset="0"/>
                 <a:ea typeface="Times New Roman" pitchFamily="34" charset="-122"/>
                 <a:cs typeface="Times New Roman" pitchFamily="34" charset="-120"/>
               </a:rPr>
-              <a:t>Illustration: factors of mass wasting</a:t>
-            </a:r>
-            <a:endParaRPr lang="en-US" sz="1600" dirty="0"/>
+              <a:t>2. Factors of Mass Wasting</a:t>
+            </a:r>
+            <a:endParaRPr lang="en-US" sz="3600" dirty="0"/>
+          </a:p>
+        </p:txBody>
+      </p:sp>
+      <p:sp>
+        <p:nvSpPr>
+          <p:cNvPr id="5" name="Text 2"/>
+          <p:cNvSpPr/>
+          <p:nvPr/>
+        </p:nvSpPr>
+        <p:spPr>
+          <a:xfrm>
+            <a:off x="5349240" y="1783080"/>
+            <a:ext cx="6522415" cy="4663440"/>
+          </a:xfrm>
+          <a:prstGeom prst="rect">
+            <a:avLst/>
+          </a:prstGeom>
+          <a:noFill/>
+          <a:ln/>
+        </p:spPr>
+        <p:txBody>
+          <a:bodyPr wrap="square" lIns="0" tIns="0" rIns="0" bIns="0" rtlCol="0" anchor="t"/>
+          <a:lstStyle/>
+          <a:p>
+            <a:pPr algn="l" indent="0" marL="0">
+              <a:spcAft>
+                <a:spcPts val="800"/>
+              </a:spcAft>
+              <a:buNone/>
+            </a:pPr>
+            <a:r>
+              <a:rPr lang="en-US" sz="4000" b="1" dirty="0">
+                <a:solidFill>
+                  <a:srgbClr val="111111"/>
+                </a:solidFill>
+                <a:latin typeface="Times New Roman" pitchFamily="34" charset="0"/>
+                <a:ea typeface="Times New Roman" pitchFamily="34" charset="-122"/>
+                <a:cs typeface="Times New Roman" pitchFamily="34" charset="-120"/>
+              </a:rPr>
+              <a:t>Water: </a:t>
+            </a:r>
+            <a:pPr algn="l" indent="0" marL="0">
+              <a:spcAft>
+                <a:spcPts val="800"/>
+              </a:spcAft>
+              <a:buNone/>
+            </a:pPr>
+            <a:r>
+              <a:rPr lang="en-US" sz="4000" dirty="0">
+                <a:solidFill>
+                  <a:srgbClr val="111111"/>
+                </a:solidFill>
+                <a:latin typeface="Times New Roman" pitchFamily="34" charset="0"/>
+                <a:ea typeface="Times New Roman" pitchFamily="34" charset="-122"/>
+                <a:cs typeface="Times New Roman" pitchFamily="34" charset="-120"/>
+              </a:rPr>
+              <a:t>Heavy or prolonged rain adds weight to the soil and reduces the friction between its particles. It is the most common trigger of landslides, especially at the end of the rainy season.</a:t>
+            </a:r>
+            <a:endParaRPr lang="en-US" sz="4000" dirty="0"/>
           </a:p>
         </p:txBody>
       </p:sp>
@@ -16628,7 +16591,7 @@
         <p:spPr>
           <a:xfrm>
             <a:off x="0" y="658368"/>
-            <a:ext cx="1463040" cy="5833872"/>
+            <a:ext cx="5120640" cy="5833872"/>
           </a:xfrm>
           <a:prstGeom prst="rect">
             <a:avLst/>
@@ -16643,8 +16606,8 @@
         </p:nvSpPr>
         <p:spPr>
           <a:xfrm>
-            <a:off x="1691640" y="1005840"/>
-            <a:ext cx="10180015" cy="731520"/>
+            <a:off x="5349240" y="1005840"/>
+            <a:ext cx="6522415" cy="731520"/>
           </a:xfrm>
           <a:prstGeom prst="rect">
             <a:avLst/>
@@ -16684,8 +16647,8 @@
         </p:nvSpPr>
         <p:spPr>
           <a:xfrm>
-            <a:off x="1691640" y="1783080"/>
-            <a:ext cx="10180015" cy="4663440"/>
+            <a:off x="5349240" y="1783080"/>
+            <a:ext cx="6522415" cy="4663440"/>
           </a:xfrm>
           <a:prstGeom prst="rect">
             <a:avLst/>
@@ -16712,7 +16675,7 @@
                 <a:ea typeface="Times New Roman" pitchFamily="34" charset="-122"/>
                 <a:cs typeface="Times New Roman" pitchFamily="34" charset="-120"/>
               </a:rPr>
-              <a:t>Water: </a:t>
+              <a:t>Vegetation: </a:t>
             </a:r>
             <a:pPr algn="l" indent="0" marL="0">
               <a:spcAft>
@@ -16729,81 +16692,7 @@
                 <a:ea typeface="Times New Roman" pitchFamily="34" charset="-122"/>
                 <a:cs typeface="Times New Roman" pitchFamily="34" charset="-120"/>
               </a:rPr>
-              <a:t>Heavy rain adds weight and lubricates particles; it is the most common trigger.</a:t>
-            </a:r>
-            <a:endParaRPr lang="en-US" sz="4000" dirty="0"/>
-          </a:p>
-          <a:p>
-            <a:pPr algn="l" indent="0" marL="0">
-              <a:spcAft>
-                <a:spcPts val="800"/>
-              </a:spcAft>
-              <a:buNone/>
-            </a:pPr>
-            <a:r>
-              <a:rPr lang="en-US" sz="4000" b="1" dirty="0">
-                <a:solidFill>
-                  <a:srgbClr val="111111"/>
-                </a:solidFill>
-                <a:latin typeface="Times New Roman" pitchFamily="34" charset="0"/>
-                <a:ea typeface="Times New Roman" pitchFamily="34" charset="-122"/>
-                <a:cs typeface="Times New Roman" pitchFamily="34" charset="-120"/>
-              </a:rPr>
-              <a:t>Slope angle: </a:t>
-            </a:r>
-            <a:pPr algn="l" indent="0" marL="0">
-              <a:spcAft>
-                <a:spcPts val="800"/>
-              </a:spcAft>
-              <a:buNone/>
-            </a:pPr>
-            <a:r>
-              <a:rPr lang="en-US" sz="4000" dirty="0">
-                <a:solidFill>
-                  <a:srgbClr val="111111"/>
-                </a:solidFill>
-                <a:latin typeface="Times New Roman" pitchFamily="34" charset="0"/>
-                <a:ea typeface="Times New Roman" pitchFamily="34" charset="-122"/>
-                <a:cs typeface="Times New Roman" pitchFamily="34" charset="-120"/>
-              </a:rPr>
-              <a:t>Slopes steeper than the angle of repose become unstable.</a:t>
-            </a:r>
-            <a:endParaRPr lang="en-US" sz="4000" dirty="0"/>
-          </a:p>
-          <a:p>
-            <a:pPr algn="l" indent="0" marL="0">
-              <a:spcAft>
-                <a:spcPts val="800"/>
-              </a:spcAft>
-              <a:buNone/>
-            </a:pPr>
-            <a:r>
-              <a:rPr lang="en-US" sz="4000" b="1" dirty="0">
-                <a:solidFill>
-                  <a:srgbClr val="111111"/>
-                </a:solidFill>
-                <a:latin typeface="Times New Roman" pitchFamily="34" charset="0"/>
-                <a:ea typeface="Times New Roman" pitchFamily="34" charset="-122"/>
-                <a:cs typeface="Times New Roman" pitchFamily="34" charset="-120"/>
-              </a:rPr>
-              <a:t>Lack of vegetation: </a:t>
-            </a:r>
-            <a:pPr algn="l" indent="0" marL="0">
-              <a:spcAft>
-                <a:spcPts val="800"/>
-              </a:spcAft>
-              <a:buNone/>
-            </a:pPr>
-            <a:r>
-              <a:rPr lang="en-US" sz="4000" dirty="0">
-                <a:solidFill>
-                  <a:srgbClr val="111111"/>
-                </a:solidFill>
-                <a:latin typeface="Times New Roman" pitchFamily="34" charset="0"/>
-                <a:ea typeface="Times New Roman" pitchFamily="34" charset="-122"/>
-                <a:cs typeface="Times New Roman" pitchFamily="34" charset="-120"/>
-              </a:rPr>
-              <a:t>Deforestation, bush fires and overgrazing remove the roots that bind the soil.</a:t>
+              <a:t>Roots bind the soil and plants absorb part of the rainwater. Deforestation, bush fires and overgrazing remove this protection and make slopes unstable.</a:t>
             </a:r>
             <a:endParaRPr lang="en-US" sz="4000" dirty="0"/>
           </a:p>
@@ -16938,7 +16827,7 @@
         <p:spPr>
           <a:xfrm>
             <a:off x="0" y="658368"/>
-            <a:ext cx="5120640" cy="5833872"/>
+            <a:ext cx="2468880" cy="5833872"/>
           </a:xfrm>
           <a:prstGeom prst="rect">
             <a:avLst/>
@@ -16953,8 +16842,8 @@
         </p:nvSpPr>
         <p:spPr>
           <a:xfrm>
-            <a:off x="5349240" y="1005840"/>
-            <a:ext cx="6522415" cy="731520"/>
+            <a:off x="2697480" y="1005840"/>
+            <a:ext cx="9174175" cy="731520"/>
           </a:xfrm>
           <a:prstGeom prst="rect">
             <a:avLst/>
@@ -16980,7 +16869,7 @@
                 <a:ea typeface="Times New Roman" pitchFamily="34" charset="-122"/>
                 <a:cs typeface="Times New Roman" pitchFamily="34" charset="-120"/>
               </a:rPr>
-              <a:t>2. Factors of Mass Wasting (continued)</a:t>
+              <a:t>2. Factors of Mass Wasting</a:t>
             </a:r>
             <a:endParaRPr lang="en-US" sz="3600" dirty="0"/>
           </a:p>
@@ -16994,8 +16883,8 @@
         </p:nvSpPr>
         <p:spPr>
           <a:xfrm>
-            <a:off x="5349240" y="1783080"/>
-            <a:ext cx="6522415" cy="4663440"/>
+            <a:off x="2697480" y="1783080"/>
+            <a:ext cx="9174175" cy="4663440"/>
           </a:xfrm>
           <a:prstGeom prst="rect">
             <a:avLst/>
@@ -17039,7 +16928,7 @@
                 <a:ea typeface="Times New Roman" pitchFamily="34" charset="-122"/>
                 <a:cs typeface="Times New Roman" pitchFamily="34" charset="-120"/>
               </a:rPr>
-              <a:t>Road cuts, waste tips, earthquakes and heavy traffic destabilise slopes.</a:t>
+              <a:t>Road cuts, quarries and houses built on steep slopes remove the support at the foot of slopes or add weight at the top. Earthquakes, blasting and heavy traffic shake the ground and can set off movements.</a:t>
             </a:r>
             <a:endParaRPr lang="en-US" sz="4000" dirty="0"/>
           </a:p>
@@ -17207,7 +17096,7 @@
         <p:spPr>
           <a:xfrm>
             <a:off x="365760" y="1783080"/>
-            <a:ext cx="4846320" cy="4617720"/>
+            <a:ext cx="6035040" cy="4617720"/>
           </a:xfrm>
           <a:prstGeom prst="rect">
             <a:avLst/>
@@ -17234,7 +17123,7 @@
                 <a:ea typeface="Times New Roman" pitchFamily="34" charset="-122"/>
                 <a:cs typeface="Times New Roman" pitchFamily="34" charset="-120"/>
               </a:rPr>
-              <a:t>Mass movements are classified by speed and water content as follows:</a:t>
+              <a:t>Carson and Kirkby classify mass movements as follows:</a:t>
             </a:r>
             <a:endParaRPr lang="en-US" sz="3200" dirty="0"/>
           </a:p>
@@ -17254,7 +17143,7 @@
                 <a:ea typeface="Times New Roman" pitchFamily="34" charset="-122"/>
                 <a:cs typeface="Times New Roman" pitchFamily="34" charset="-120"/>
               </a:rPr>
-              <a:t>Carson and Kirkby: </a:t>
+              <a:t>Basis of the classification: </a:t>
             </a:r>
             <a:pPr algn="l" indent="0" marL="0">
               <a:spcAft>
@@ -17271,7 +17160,7 @@
                 <a:ea typeface="Times New Roman" pitchFamily="34" charset="-122"/>
                 <a:cs typeface="Times New Roman" pitchFamily="34" charset="-120"/>
               </a:rPr>
-              <a:t>Their triangle classifies movements from slow to fast and from dry to wet.</a:t>
+              <a:t>The triangular graph of Carson and Kirkby classifies movements by their speed and their water content. Its three corners are heave (slow, like creep), flow (wet) and slide (fast and dry).</a:t>
             </a:r>
             <a:endParaRPr lang="en-US" sz="3200" dirty="0"/>
           </a:p>
@@ -17293,8 +17182,8 @@
         </p:blipFill>
         <p:spPr>
           <a:xfrm>
-            <a:off x="5349240" y="2617506"/>
-            <a:ext cx="6659575" cy="2601397"/>
+            <a:off x="6537960" y="2849678"/>
+            <a:ext cx="5470855" cy="2137053"/>
           </a:xfrm>
           <a:prstGeom prst="rect">
             <a:avLst/>
@@ -17309,8 +17198,8 @@
         </p:nvSpPr>
         <p:spPr>
           <a:xfrm>
-            <a:off x="5349240" y="6089904"/>
-            <a:ext cx="6659575" cy="347472"/>
+            <a:off x="6537960" y="6089904"/>
+            <a:ext cx="5470855" cy="347472"/>
           </a:xfrm>
           <a:prstGeom prst="rect">
             <a:avLst/>
@@ -17334,7 +17223,7 @@
                 <a:ea typeface="Times New Roman" pitchFamily="34" charset="-122"/>
                 <a:cs typeface="Times New Roman" pitchFamily="34" charset="-120"/>
               </a:rPr>
-              <a:t>Illustration: classification of mass movements</a:t>
+              <a:t>Illustration: Carson and Kirkby's triangle</a:t>
             </a:r>
             <a:endParaRPr lang="en-US" sz="1600" dirty="0"/>
           </a:p>
@@ -17469,7 +17358,7 @@
         <p:spPr>
           <a:xfrm>
             <a:off x="0" y="658368"/>
-            <a:ext cx="5120640" cy="5833872"/>
+            <a:ext cx="3840480" cy="5833872"/>
           </a:xfrm>
           <a:prstGeom prst="rect">
             <a:avLst/>
@@ -17484,8 +17373,8 @@
         </p:nvSpPr>
         <p:spPr>
           <a:xfrm>
-            <a:off x="5349240" y="1005840"/>
-            <a:ext cx="6522415" cy="731520"/>
+            <a:off x="4069080" y="1005840"/>
+            <a:ext cx="7802575" cy="731520"/>
           </a:xfrm>
           <a:prstGeom prst="rect">
             <a:avLst/>
@@ -17525,8 +17414,8 @@
         </p:nvSpPr>
         <p:spPr>
           <a:xfrm>
-            <a:off x="5349240" y="1783080"/>
-            <a:ext cx="6522415" cy="4663440"/>
+            <a:off x="4069080" y="1783080"/>
+            <a:ext cx="7802575" cy="4663440"/>
           </a:xfrm>
           <a:prstGeom prst="rect">
             <a:avLst/>
@@ -17553,7 +17442,7 @@
                 <a:ea typeface="Times New Roman" pitchFamily="34" charset="-122"/>
                 <a:cs typeface="Times New Roman" pitchFamily="34" charset="-120"/>
               </a:rPr>
-              <a:t>Creep: </a:t>
+              <a:t>Heave (slow movements): </a:t>
             </a:r>
             <a:pPr algn="l" indent="0" marL="0">
               <a:spcAft>
@@ -17570,44 +17459,7 @@
                 <a:ea typeface="Times New Roman" pitchFamily="34" charset="-122"/>
                 <a:cs typeface="Times New Roman" pitchFamily="34" charset="-120"/>
               </a:rPr>
-              <a:t>It is the slowest and most common movement.</a:t>
-            </a:r>
-            <a:endParaRPr lang="en-US" sz="4000" dirty="0"/>
-          </a:p>
-          <a:p>
-            <a:pPr algn="l" indent="0" marL="0">
-              <a:spcAft>
-                <a:spcPts val="800"/>
-              </a:spcAft>
-              <a:buNone/>
-            </a:pPr>
-            <a:r>
-              <a:rPr lang="en-US" sz="4000" b="1" dirty="0">
-                <a:solidFill>
-                  <a:srgbClr val="111111"/>
-                </a:solidFill>
-                <a:latin typeface="Times New Roman" pitchFamily="34" charset="0"/>
-                <a:ea typeface="Times New Roman" pitchFamily="34" charset="-122"/>
-                <a:cs typeface="Times New Roman" pitchFamily="34" charset="-120"/>
-              </a:rPr>
-              <a:t>Falls: </a:t>
-            </a:r>
-            <a:pPr algn="l" indent="0" marL="0">
-              <a:spcAft>
-                <a:spcPts val="800"/>
-              </a:spcAft>
-              <a:buNone/>
-            </a:pPr>
-            <a:r>
-              <a:rPr lang="en-US" sz="4000" dirty="0">
-                <a:solidFill>
-                  <a:srgbClr val="111111"/>
-                </a:solidFill>
-                <a:latin typeface="Times New Roman" pitchFamily="34" charset="0"/>
-                <a:ea typeface="Times New Roman" pitchFamily="34" charset="-122"/>
-                <a:cs typeface="Times New Roman" pitchFamily="34" charset="-120"/>
-              </a:rPr>
-              <a:t>They are fast and dry: rocks fall freely from steep cliffs.</a:t>
+              <a:t>Heave movements, such as soil creep, are very slow, a few millimetres to centimetres a year. They are caused by the repeated expansion and contraction of the soil when it wets and dries.</a:t>
             </a:r>
             <a:endParaRPr lang="en-US" sz="4000" dirty="0"/>
           </a:p>
@@ -17775,7 +17627,7 @@
         <p:spPr>
           <a:xfrm>
             <a:off x="365760" y="1783080"/>
-            <a:ext cx="4846320" cy="4617720"/>
+            <a:ext cx="6035040" cy="4617720"/>
           </a:xfrm>
           <a:prstGeom prst="rect">
             <a:avLst/>
@@ -17802,7 +17654,7 @@
                 <a:ea typeface="Times New Roman" pitchFamily="34" charset="-122"/>
                 <a:cs typeface="Times New Roman" pitchFamily="34" charset="-120"/>
               </a:rPr>
-              <a:t>Slides: </a:t>
+              <a:t>Slides and falls (fast, dry movements): </a:t>
             </a:r>
             <a:pPr algn="l" indent="0" marL="0">
               <a:spcAft>
@@ -17819,7 +17671,7 @@
                 <a:ea typeface="Times New Roman" pitchFamily="34" charset="-122"/>
                 <a:cs typeface="Times New Roman" pitchFamily="34" charset="-120"/>
               </a:rPr>
-              <a:t>A block moves quickly over a distinct surface, as in a landslide.</a:t>
+              <a:t>In slides, a block moves quickly over a distinct surface, as in landslides and slumps. In falls, rocks drop freely from cliffs.</a:t>
             </a:r>
             <a:endParaRPr lang="en-US" sz="3600" dirty="0"/>
           </a:p>
@@ -17841,8 +17693,8 @@
         </p:blipFill>
         <p:spPr>
           <a:xfrm>
-            <a:off x="5349240" y="2071212"/>
-            <a:ext cx="6659575" cy="3693983"/>
+            <a:off x="6537960" y="2400897"/>
+            <a:ext cx="5470855" cy="3034615"/>
           </a:xfrm>
           <a:prstGeom prst="rect">
             <a:avLst/>
@@ -17857,8 +17709,8 @@
         </p:nvSpPr>
         <p:spPr>
           <a:xfrm>
-            <a:off x="5349240" y="6089904"/>
-            <a:ext cx="6659575" cy="347472"/>
+            <a:off x="6537960" y="6089904"/>
+            <a:ext cx="5470855" cy="347472"/>
           </a:xfrm>
           <a:prstGeom prst="rect">
             <a:avLst/>
@@ -18101,7 +17953,7 @@
                 <a:ea typeface="Times New Roman" pitchFamily="34" charset="-122"/>
                 <a:cs typeface="Times New Roman" pitchFamily="34" charset="-120"/>
               </a:rPr>
-              <a:t>Flows: </a:t>
+              <a:t>Flows (wet movements): </a:t>
             </a:r>
             <a:pPr algn="l" indent="0" marL="0">
               <a:spcAft>
@@ -18118,7 +17970,7 @@
                 <a:ea typeface="Times New Roman" pitchFamily="34" charset="-122"/>
                 <a:cs typeface="Times New Roman" pitchFamily="34" charset="-120"/>
               </a:rPr>
-              <a:t>They are fast and wet: material moves like a thick liquid, as in mudflows after sudden storms.</a:t>
+              <a:t>In flows, the material contains much water and moves like a thick liquid. Solifluction is a slow flow, while mudflows are fast.</a:t>
             </a:r>
             <a:endParaRPr lang="en-US" sz="4000" dirty="0"/>
           </a:p>
